--- a/9_Short_Presentation.pptx
+++ b/9_Short_Presentation.pptx
@@ -308,7 +308,7 @@
               </a:lnSpc>
             </a:pPr>
             <a:r>
-              <a:rPr lang="en-US" sz="2800" b="1" noProof="1">
+              <a:rPr lang="en-US" sz="2600" b="1" noProof="1">
                 <a:solidFill>
                   <a:srgbClr val="172526"/>
                 </a:solidFill>
@@ -317,7 +317,7 @@
               </a:rPr>
               <a:t>Ручной контроль конденсата создаёт два источника потерь: простои линии и возвраты продукции</a:t>
             </a:r>
-            <a:endParaRPr lang="en-US" sz="2800" noProof="1"/>
+            <a:endParaRPr lang="en-US" sz="2600" noProof="1"/>
           </a:p>
         </p:txBody>
       </p:sp>
@@ -434,7 +434,7 @@
           <p:nvPr>
             <p:extLst>
               <p:ext uri="{F5677B7D-0D2A-4D9B-9A5C-6D8D7D0E5A5D}">
-                <pptd:line xmlns:pptd="https://kimi-design.msh.team/pptd/2026" xmlns:mc="http://schemas.openxmlformats.org/markup-compatibility/2006" xmlns:m="http://schemas.openxmlformats.org/officeDocument/2006/math" xmlns:cx="http://schemas.microsoft.com/office/drawing/2014/chartex" xmlns:c="http://schemas.openxmlformats.org/drawingml/2006/chart" xmlns:a14="http://schemas.microsoft.com/office/drawing/2010/main" xmlns="" encoding="base64url">eyJ2aWV3Qm94IjpbMSw0N10sInBvaW50cyI6IjAsMCAwLDQ3In0</pptd:line>
+                <pptd:line xmlns="" xmlns:a14="http://schemas.microsoft.com/office/drawing/2010/main" xmlns:c="http://schemas.openxmlformats.org/drawingml/2006/chart" xmlns:cx="http://schemas.microsoft.com/office/drawing/2014/chartex" xmlns:m="http://schemas.openxmlformats.org/officeDocument/2006/math" xmlns:mc="http://schemas.openxmlformats.org/markup-compatibility/2006" xmlns:pptd="https://kimi-design.msh.team/pptd/2026" encoding="base64url">eyJ2aWV3Qm94IjpbMSw0N10sInBvaW50cyI6IjAsMCAwLDQ3In0</pptd:line>
               </p:ext>
             </p:extLst>
           </p:nvPr>
@@ -561,7 +561,7 @@
           <p:nvPr>
             <p:extLst>
               <p:ext uri="{F5677B7D-0D2A-4D9B-9A5C-6D8D7D0E5A5D}">
-                <pptd:line xmlns:pptd="https://kimi-design.msh.team/pptd/2026" xmlns:mc="http://schemas.openxmlformats.org/markup-compatibility/2006" xmlns:m="http://schemas.openxmlformats.org/officeDocument/2006/math" xmlns:cx="http://schemas.microsoft.com/office/drawing/2014/chartex" xmlns:c="http://schemas.openxmlformats.org/drawingml/2006/chart" xmlns:a14="http://schemas.microsoft.com/office/drawing/2010/main" xmlns="" encoding="base64url">eyJ2aWV3Qm94IjpbMSw0N10sInBvaW50cyI6IjAsMCAwLDQ3In0</pptd:line>
+                <pptd:line xmlns="" xmlns:a14="http://schemas.microsoft.com/office/drawing/2010/main" xmlns:c="http://schemas.openxmlformats.org/drawingml/2006/chart" xmlns:cx="http://schemas.microsoft.com/office/drawing/2014/chartex" xmlns:m="http://schemas.openxmlformats.org/officeDocument/2006/math" xmlns:mc="http://schemas.openxmlformats.org/markup-compatibility/2006" xmlns:pptd="https://kimi-design.msh.team/pptd/2026" encoding="base64url">eyJ2aWV3Qm94IjpbMSw0N10sInBvaW50cyI6IjAsMCAwLDQ3In0</pptd:line>
               </p:ext>
             </p:extLst>
           </p:nvPr>
@@ -688,7 +688,7 @@
           <p:nvPr>
             <p:extLst>
               <p:ext uri="{F5677B7D-0D2A-4D9B-9A5C-6D8D7D0E5A5D}">
-                <pptd:line xmlns:pptd="https://kimi-design.msh.team/pptd/2026" xmlns:mc="http://schemas.openxmlformats.org/markup-compatibility/2006" xmlns:m="http://schemas.openxmlformats.org/officeDocument/2006/math" xmlns:cx="http://schemas.microsoft.com/office/drawing/2014/chartex" xmlns:c="http://schemas.openxmlformats.org/drawingml/2006/chart" xmlns:a14="http://schemas.microsoft.com/office/drawing/2010/main" xmlns="" encoding="base64url">eyJ2aWV3Qm94IjpbMSw0N10sInBvaW50cyI6IjAsMCAwLDQ3In0</pptd:line>
+                <pptd:line xmlns="" xmlns:a14="http://schemas.microsoft.com/office/drawing/2010/main" xmlns:c="http://schemas.openxmlformats.org/drawingml/2006/chart" xmlns:cx="http://schemas.microsoft.com/office/drawing/2014/chartex" xmlns:m="http://schemas.openxmlformats.org/officeDocument/2006/math" xmlns:mc="http://schemas.openxmlformats.org/markup-compatibility/2006" xmlns:pptd="https://kimi-design.msh.team/pptd/2026" encoding="base64url">eyJ2aWV3Qm94IjpbMSw0N10sInBvaW50cyI6IjAsMCAwLDQ3In0</pptd:line>
               </p:ext>
             </p:extLst>
           </p:nvPr>
@@ -815,7 +815,7 @@
           <p:nvPr>
             <p:extLst>
               <p:ext uri="{F5677B7D-0D2A-4D9B-9A5C-6D8D7D0E5A5D}">
-                <pptd:line xmlns:pptd="https://kimi-design.msh.team/pptd/2026" xmlns:mc="http://schemas.openxmlformats.org/markup-compatibility/2006" xmlns:m="http://schemas.openxmlformats.org/officeDocument/2006/math" xmlns:cx="http://schemas.microsoft.com/office/drawing/2014/chartex" xmlns:c="http://schemas.openxmlformats.org/drawingml/2006/chart" xmlns:a14="http://schemas.microsoft.com/office/drawing/2010/main" xmlns="" encoding="base64url">eyJ2aWV3Qm94IjpbNzcwLDFdLCJwb2ludHMiOiIwLDAgNzcwLDAifQ</pptd:line>
+                <pptd:line xmlns="" xmlns:a14="http://schemas.microsoft.com/office/drawing/2010/main" xmlns:c="http://schemas.openxmlformats.org/drawingml/2006/chart" xmlns:cx="http://schemas.microsoft.com/office/drawing/2014/chartex" xmlns:m="http://schemas.openxmlformats.org/officeDocument/2006/math" xmlns:mc="http://schemas.openxmlformats.org/markup-compatibility/2006" xmlns:pptd="https://kimi-design.msh.team/pptd/2026" encoding="base64url">eyJ2aWV3Qm94IjpbNzcwLDFdLCJwb2ludHMiOiIwLDAgNzcwLDAifQ</pptd:line>
               </p:ext>
             </p:extLst>
           </p:nvPr>
@@ -859,7 +859,7 @@
           <p:nvPr>
             <p:extLst>
               <p:ext uri="{F5677B7D-0D2A-4D9B-9A5C-6D8D7D0E5A5D}">
-                <pptd:icon xmlns:pptd="https://kimi-design.msh.team/pptd/2026" xmlns:mc="http://schemas.openxmlformats.org/markup-compatibility/2006" xmlns:m="http://schemas.openxmlformats.org/officeDocument/2006/math" xmlns:cx="http://schemas.microsoft.com/office/drawing/2014/chartex" xmlns:c="http://schemas.openxmlformats.org/drawingml/2006/chart" xmlns:a14="http://schemas.microsoft.com/office/drawing/2010/main" xmlns="" encoding="base64url">eyJpY29uTmFtZSI6ImZhczppbmR1c3RyeSJ9</pptd:icon>
+                <pptd:icon xmlns="" xmlns:a14="http://schemas.microsoft.com/office/drawing/2010/main" xmlns:c="http://schemas.openxmlformats.org/drawingml/2006/chart" xmlns:cx="http://schemas.microsoft.com/office/drawing/2014/chartex" xmlns:m="http://schemas.openxmlformats.org/officeDocument/2006/math" xmlns:mc="http://schemas.openxmlformats.org/markup-compatibility/2006" xmlns:pptd="https://kimi-design.msh.team/pptd/2026" encoding="base64url">eyJpY29uTmFtZSI6ImZhczppbmR1c3RyeSJ9</pptd:icon>
               </p:ext>
             </p:extLst>
           </p:nvPr>
@@ -1013,7 +1013,7 @@
           <p:nvPr>
             <p:extLst>
               <p:ext uri="{F5677B7D-0D2A-4D9B-9A5C-6D8D7D0E5A5D}">
-                <pptd:icon xmlns:pptd="https://kimi-design.msh.team/pptd/2026" xmlns:mc="http://schemas.openxmlformats.org/markup-compatibility/2006" xmlns:m="http://schemas.openxmlformats.org/officeDocument/2006/math" xmlns:cx="http://schemas.microsoft.com/office/drawing/2014/chartex" xmlns:c="http://schemas.openxmlformats.org/drawingml/2006/chart" xmlns:a14="http://schemas.microsoft.com/office/drawing/2010/main" xmlns="" encoding="base64url">eyJpY29uTmFtZSI6ImZhczpib3gtb3BlbiJ9</pptd:icon>
+                <pptd:icon xmlns="" xmlns:a14="http://schemas.microsoft.com/office/drawing/2010/main" xmlns:c="http://schemas.openxmlformats.org/drawingml/2006/chart" xmlns:cx="http://schemas.microsoft.com/office/drawing/2014/chartex" xmlns:m="http://schemas.openxmlformats.org/officeDocument/2006/math" xmlns:mc="http://schemas.openxmlformats.org/markup-compatibility/2006" xmlns:pptd="https://kimi-design.msh.team/pptd/2026" encoding="base64url">eyJpY29uTmFtZSI6ImZhczpib3gtb3BlbiJ9</pptd:icon>
               </p:ext>
             </p:extLst>
           </p:nvPr>
@@ -1217,7 +1217,7 @@
           <p:nvPr>
             <p:extLst>
               <p:ext uri="{F5677B7D-0D2A-4D9B-9A5C-6D8D7D0E5A5D}">
-                <pptd:icon xmlns:pptd="https://kimi-design.msh.team/pptd/2026" xmlns:mc="http://schemas.openxmlformats.org/markup-compatibility/2006" xmlns:m="http://schemas.openxmlformats.org/officeDocument/2006/math" xmlns:cx="http://schemas.microsoft.com/office/drawing/2014/chartex" xmlns:c="http://schemas.openxmlformats.org/drawingml/2006/chart" xmlns:a14="http://schemas.microsoft.com/office/drawing/2010/main" xmlns="" encoding="base64url">eyJpY29uTmFtZSI6ImZhczp0cnVjayJ9</pptd:icon>
+                <pptd:icon xmlns="" xmlns:a14="http://schemas.microsoft.com/office/drawing/2010/main" xmlns:c="http://schemas.openxmlformats.org/drawingml/2006/chart" xmlns:cx="http://schemas.microsoft.com/office/drawing/2014/chartex" xmlns:m="http://schemas.openxmlformats.org/officeDocument/2006/math" xmlns:mc="http://schemas.openxmlformats.org/markup-compatibility/2006" xmlns:pptd="https://kimi-design.msh.team/pptd/2026" encoding="base64url">eyJpY29uTmFtZSI6ImZhczp0cnVjayJ9</pptd:icon>
               </p:ext>
             </p:extLst>
           </p:nvPr>
@@ -1799,7 +1799,7 @@
           <p:nvPr>
             <p:extLst>
               <p:ext uri="{F5677B7D-0D2A-4D9B-9A5C-6D8D7D0E5A5D}">
-                <pptd:line xmlns:pptd="https://kimi-design.msh.team/pptd/2026" xmlns:mc="http://schemas.openxmlformats.org/markup-compatibility/2006" xmlns:m="http://schemas.openxmlformats.org/officeDocument/2006/math" xmlns:cx="http://schemas.microsoft.com/office/drawing/2014/chartex" xmlns:c="http://schemas.openxmlformats.org/drawingml/2006/chart" xmlns:a14="http://schemas.microsoft.com/office/drawing/2010/main" xmlns="" encoding="base64url">eyJ2aWV3Qm94IjpbMSwxNTBdLCJwb2ludHMiOiIwLDAgMCwxNTAifQ</pptd:line>
+                <pptd:line xmlns="" xmlns:a14="http://schemas.microsoft.com/office/drawing/2010/main" xmlns:c="http://schemas.openxmlformats.org/drawingml/2006/chart" xmlns:cx="http://schemas.microsoft.com/office/drawing/2014/chartex" xmlns:m="http://schemas.openxmlformats.org/officeDocument/2006/math" xmlns:mc="http://schemas.openxmlformats.org/markup-compatibility/2006" xmlns:pptd="https://kimi-design.msh.team/pptd/2026" encoding="base64url">eyJ2aWV3Qm94IjpbMSwxNTBdLCJwb2ludHMiOiIwLDAgMCwxNTAifQ</pptd:line>
               </p:ext>
             </p:extLst>
           </p:nvPr>
@@ -2369,7 +2369,7 @@
               </a:lnSpc>
             </a:pPr>
             <a:r>
-              <a:rPr lang="en-US" sz="2800" b="1" noProof="1">
+              <a:rPr lang="en-US" sz="2600" b="1" noProof="1">
                 <a:solidFill>
                   <a:srgbClr val="172526"/>
                 </a:solidFill>
@@ -2379,7 +2379,7 @@
               <a:t>Камера выявляет дефект, а толкатель удаляет лоток:
 линия продолжает работать без остановки</a:t>
             </a:r>
-            <a:endParaRPr lang="en-US" sz="2800" noProof="1"/>
+            <a:endParaRPr lang="en-US" sz="2600" noProof="1"/>
           </a:p>
         </p:txBody>
       </p:sp>
@@ -2496,7 +2496,7 @@
           <p:nvPr>
             <p:extLst>
               <p:ext uri="{F5677B7D-0D2A-4D9B-9A5C-6D8D7D0E5A5D}">
-                <pptd:line xmlns:pptd="https://kimi-design.msh.team/pptd/2026" xmlns:mc="http://schemas.openxmlformats.org/markup-compatibility/2006" xmlns:m="http://schemas.openxmlformats.org/officeDocument/2006/math" xmlns:cx="http://schemas.microsoft.com/office/drawing/2014/chartex" xmlns:c="http://schemas.openxmlformats.org/drawingml/2006/chart" xmlns:a14="http://schemas.microsoft.com/office/drawing/2010/main" xmlns="" encoding="base64url">eyJ2aWV3Qm94IjpbMSw0N10sInBvaW50cyI6IjAsMCAwLDQ3In0</pptd:line>
+                <pptd:line xmlns="" xmlns:a14="http://schemas.microsoft.com/office/drawing/2010/main" xmlns:c="http://schemas.openxmlformats.org/drawingml/2006/chart" xmlns:cx="http://schemas.microsoft.com/office/drawing/2014/chartex" xmlns:m="http://schemas.openxmlformats.org/officeDocument/2006/math" xmlns:mc="http://schemas.openxmlformats.org/markup-compatibility/2006" xmlns:pptd="https://kimi-design.msh.team/pptd/2026" encoding="base64url">eyJ2aWV3Qm94IjpbMSw0N10sInBvaW50cyI6IjAsMCAwLDQ3In0</pptd:line>
               </p:ext>
             </p:extLst>
           </p:nvPr>
@@ -2623,7 +2623,7 @@
           <p:nvPr>
             <p:extLst>
               <p:ext uri="{F5677B7D-0D2A-4D9B-9A5C-6D8D7D0E5A5D}">
-                <pptd:line xmlns:pptd="https://kimi-design.msh.team/pptd/2026" xmlns:mc="http://schemas.openxmlformats.org/markup-compatibility/2006" xmlns:m="http://schemas.openxmlformats.org/officeDocument/2006/math" xmlns:cx="http://schemas.microsoft.com/office/drawing/2014/chartex" xmlns:c="http://schemas.openxmlformats.org/drawingml/2006/chart" xmlns:a14="http://schemas.microsoft.com/office/drawing/2010/main" xmlns="" encoding="base64url">eyJ2aWV3Qm94IjpbMSw0N10sInBvaW50cyI6IjAsMCAwLDQ3In0</pptd:line>
+                <pptd:line xmlns="" xmlns:a14="http://schemas.microsoft.com/office/drawing/2010/main" xmlns:c="http://schemas.openxmlformats.org/drawingml/2006/chart" xmlns:cx="http://schemas.microsoft.com/office/drawing/2014/chartex" xmlns:m="http://schemas.openxmlformats.org/officeDocument/2006/math" xmlns:mc="http://schemas.openxmlformats.org/markup-compatibility/2006" xmlns:pptd="https://kimi-design.msh.team/pptd/2026" encoding="base64url">eyJ2aWV3Qm94IjpbMSw0N10sInBvaW50cyI6IjAsMCAwLDQ3In0</pptd:line>
               </p:ext>
             </p:extLst>
           </p:nvPr>
@@ -2750,7 +2750,7 @@
           <p:nvPr>
             <p:extLst>
               <p:ext uri="{F5677B7D-0D2A-4D9B-9A5C-6D8D7D0E5A5D}">
-                <pptd:line xmlns:pptd="https://kimi-design.msh.team/pptd/2026" xmlns:mc="http://schemas.openxmlformats.org/markup-compatibility/2006" xmlns:m="http://schemas.openxmlformats.org/officeDocument/2006/math" xmlns:cx="http://schemas.microsoft.com/office/drawing/2014/chartex" xmlns:c="http://schemas.openxmlformats.org/drawingml/2006/chart" xmlns:a14="http://schemas.microsoft.com/office/drawing/2010/main" xmlns="" encoding="base64url">eyJ2aWV3Qm94IjpbMSw0N10sInBvaW50cyI6IjAsMCAwLDQ3In0</pptd:line>
+                <pptd:line xmlns="" xmlns:a14="http://schemas.microsoft.com/office/drawing/2010/main" xmlns:c="http://schemas.openxmlformats.org/drawingml/2006/chart" xmlns:cx="http://schemas.microsoft.com/office/drawing/2014/chartex" xmlns:m="http://schemas.openxmlformats.org/officeDocument/2006/math" xmlns:mc="http://schemas.openxmlformats.org/markup-compatibility/2006" xmlns:pptd="https://kimi-design.msh.team/pptd/2026" encoding="base64url">eyJ2aWV3Qm94IjpbMSw0N10sInBvaW50cyI6IjAsMCAwLDQ3In0</pptd:line>
               </p:ext>
             </p:extLst>
           </p:nvPr>
@@ -2919,7 +2919,7 @@
           <p:nvPr>
             <p:extLst>
               <p:ext uri="{F5677B7D-0D2A-4D9B-9A5C-6D8D7D0E5A5D}">
-                <pptd:icon xmlns:pptd="https://kimi-design.msh.team/pptd/2026" xmlns:mc="http://schemas.openxmlformats.org/markup-compatibility/2006" xmlns:m="http://schemas.openxmlformats.org/officeDocument/2006/math" xmlns:cx="http://schemas.microsoft.com/office/drawing/2014/chartex" xmlns:c="http://schemas.openxmlformats.org/drawingml/2006/chart" xmlns:a14="http://schemas.microsoft.com/office/drawing/2010/main" xmlns="" encoding="base64url">eyJpY29uTmFtZSI6ImZhczpjYW1lcmEifQ</pptd:icon>
+                <pptd:icon xmlns="" xmlns:a14="http://schemas.microsoft.com/office/drawing/2010/main" xmlns:c="http://schemas.openxmlformats.org/drawingml/2006/chart" xmlns:cx="http://schemas.microsoft.com/office/drawing/2014/chartex" xmlns:m="http://schemas.openxmlformats.org/officeDocument/2006/math" xmlns:mc="http://schemas.openxmlformats.org/markup-compatibility/2006" xmlns:pptd="https://kimi-design.msh.team/pptd/2026" encoding="base64url">eyJpY29uTmFtZSI6ImZhczpjYW1lcmEifQ</pptd:icon>
               </p:ext>
             </p:extLst>
           </p:nvPr>
@@ -3121,14 +3121,14 @@
           <p:nvPr>
             <p:extLst>
               <p:ext uri="{F5677B7D-0D2A-4D9B-9A5C-6D8D7D0E5A5D}">
-                <pptd:line xmlns:pptd="https://kimi-design.msh.team/pptd/2026" xmlns:mc="http://schemas.openxmlformats.org/markup-compatibility/2006" xmlns:m="http://schemas.openxmlformats.org/officeDocument/2006/math" xmlns:cx="http://schemas.microsoft.com/office/drawing/2014/chartex" xmlns:c="http://schemas.openxmlformats.org/drawingml/2006/chart" xmlns:a14="http://schemas.microsoft.com/office/drawing/2010/main" xmlns="" encoding="base64url">eyJ2aWV3Qm94IjpbNDIsMV0sInBvaW50cyI6IjAsMCA0MiwwIn0</pptd:line>
+                <pptd:line xmlns="" xmlns:a14="http://schemas.microsoft.com/office/drawing/2010/main" xmlns:c="http://schemas.openxmlformats.org/drawingml/2006/chart" xmlns:cx="http://schemas.microsoft.com/office/drawing/2014/chartex" xmlns:m="http://schemas.openxmlformats.org/officeDocument/2006/math" xmlns:mc="http://schemas.openxmlformats.org/markup-compatibility/2006" xmlns:pptd="https://kimi-design.msh.team/pptd/2026" encoding="base64url">eyJ2aWV3Qm94IjpbNDIsMV0sInBvaW50cyI6IjAsMCA0MiwwIn0</pptd:line>
               </p:ext>
             </p:extLst>
           </p:nvPr>
         </p:nvSpPr>
         <p:spPr>
           <a:xfrm>
-            <a:off x="2336800" y="3403600"/>
+            <a:off x="3012044" y="3403600"/>
             <a:ext cx="533400" cy="12700"/>
           </a:xfrm>
           <a:custGeom>
@@ -3165,14 +3165,14 @@
           <p:nvPr>
             <p:extLst>
               <p:ext uri="{F5677B7D-0D2A-4D9B-9A5C-6D8D7D0E5A5D}">
-                <pptd:icon xmlns:pptd="https://kimi-design.msh.team/pptd/2026" xmlns:mc="http://schemas.openxmlformats.org/markup-compatibility/2006" xmlns:m="http://schemas.openxmlformats.org/officeDocument/2006/math" xmlns:cx="http://schemas.microsoft.com/office/drawing/2014/chartex" xmlns:c="http://schemas.openxmlformats.org/drawingml/2006/chart" xmlns:a14="http://schemas.microsoft.com/office/drawing/2010/main" xmlns="" encoding="base64url">eyJpY29uTmFtZSI6ImZhczptaWNyb2NoaXAifQ</pptd:icon>
+                <pptd:icon xmlns="" xmlns:a14="http://schemas.microsoft.com/office/drawing/2010/main" xmlns:c="http://schemas.openxmlformats.org/drawingml/2006/chart" xmlns:cx="http://schemas.microsoft.com/office/drawing/2014/chartex" xmlns:m="http://schemas.openxmlformats.org/officeDocument/2006/math" xmlns:mc="http://schemas.openxmlformats.org/markup-compatibility/2006" xmlns:pptd="https://kimi-design.msh.team/pptd/2026" encoding="base64url">eyJpY29uTmFtZSI6ImZhczptaWNyb2NoaXAifQ</pptd:icon>
               </p:ext>
             </p:extLst>
           </p:nvPr>
         </p:nvSpPr>
         <p:spPr>
           <a:xfrm>
-            <a:off x="2997200" y="3213100"/>
+            <a:off x="3672444" y="3213100"/>
             <a:ext cx="393700" cy="393700"/>
           </a:xfrm>
           <a:custGeom>
@@ -3579,14 +3579,14 @@
           <p:nvPr>
             <p:extLst>
               <p:ext uri="{F5677B7D-0D2A-4D9B-9A5C-6D8D7D0E5A5D}">
-                <pptd:line xmlns:pptd="https://kimi-design.msh.team/pptd/2026" xmlns:mc="http://schemas.openxmlformats.org/markup-compatibility/2006" xmlns:m="http://schemas.openxmlformats.org/officeDocument/2006/math" xmlns:cx="http://schemas.microsoft.com/office/drawing/2014/chartex" xmlns:c="http://schemas.openxmlformats.org/drawingml/2006/chart" xmlns:a14="http://schemas.microsoft.com/office/drawing/2010/main" xmlns="" encoding="base64url">eyJ2aWV3Qm94IjpbNDIsMV0sInBvaW50cyI6IjAsMCA0MiwwIn0</pptd:line>
+                <pptd:line xmlns="" xmlns:a14="http://schemas.microsoft.com/office/drawing/2010/main" xmlns:c="http://schemas.openxmlformats.org/drawingml/2006/chart" xmlns:cx="http://schemas.microsoft.com/office/drawing/2014/chartex" xmlns:m="http://schemas.openxmlformats.org/officeDocument/2006/math" xmlns:mc="http://schemas.openxmlformats.org/markup-compatibility/2006" xmlns:pptd="https://kimi-design.msh.team/pptd/2026" encoding="base64url">eyJ2aWV3Qm94IjpbNDIsMV0sInBvaW50cyI6IjAsMCA0MiwwIn0</pptd:line>
               </p:ext>
             </p:extLst>
           </p:nvPr>
         </p:nvSpPr>
         <p:spPr>
           <a:xfrm>
-            <a:off x="4902200" y="3403600"/>
+            <a:off x="5577444" y="3403600"/>
             <a:ext cx="533400" cy="12700"/>
           </a:xfrm>
           <a:custGeom>
@@ -3623,14 +3623,14 @@
           <p:nvPr>
             <p:extLst>
               <p:ext uri="{F5677B7D-0D2A-4D9B-9A5C-6D8D7D0E5A5D}">
-                <pptd:icon xmlns:pptd="https://kimi-design.msh.team/pptd/2026" xmlns:mc="http://schemas.openxmlformats.org/markup-compatibility/2006" xmlns:m="http://schemas.openxmlformats.org/officeDocument/2006/math" xmlns:cx="http://schemas.microsoft.com/office/drawing/2014/chartex" xmlns:c="http://schemas.openxmlformats.org/drawingml/2006/chart" xmlns:a14="http://schemas.microsoft.com/office/drawing/2010/main" xmlns="" encoding="base64url">eyJpY29uTmFtZSI6ImZhczpnZWFycyJ9</pptd:icon>
+                <pptd:icon xmlns="" xmlns:a14="http://schemas.microsoft.com/office/drawing/2010/main" xmlns:c="http://schemas.openxmlformats.org/drawingml/2006/chart" xmlns:cx="http://schemas.microsoft.com/office/drawing/2014/chartex" xmlns:m="http://schemas.openxmlformats.org/officeDocument/2006/math" xmlns:mc="http://schemas.openxmlformats.org/markup-compatibility/2006" xmlns:pptd="https://kimi-design.msh.team/pptd/2026" encoding="base64url">eyJpY29uTmFtZSI6ImZhczpnZWFycyJ9</pptd:icon>
               </p:ext>
             </p:extLst>
           </p:nvPr>
         </p:nvSpPr>
         <p:spPr>
           <a:xfrm>
-            <a:off x="5562600" y="3213100"/>
+            <a:off x="6237844" y="3213100"/>
             <a:ext cx="533400" cy="393700"/>
           </a:xfrm>
           <a:custGeom>
@@ -4109,14 +4109,14 @@
           <p:nvPr>
             <p:extLst>
               <p:ext uri="{F5677B7D-0D2A-4D9B-9A5C-6D8D7D0E5A5D}">
-                <pptd:line xmlns:pptd="https://kimi-design.msh.team/pptd/2026" xmlns:mc="http://schemas.openxmlformats.org/markup-compatibility/2006" xmlns:m="http://schemas.openxmlformats.org/officeDocument/2006/math" xmlns:cx="http://schemas.microsoft.com/office/drawing/2014/chartex" xmlns:c="http://schemas.openxmlformats.org/drawingml/2006/chart" xmlns:a14="http://schemas.microsoft.com/office/drawing/2010/main" xmlns="" encoding="base64url">eyJ2aWV3Qm94IjpbNDIsMV0sInBvaW50cyI6IjAsMCA0MiwwIn0</pptd:line>
+                <pptd:line xmlns="" xmlns:a14="http://schemas.microsoft.com/office/drawing/2010/main" xmlns:c="http://schemas.openxmlformats.org/drawingml/2006/chart" xmlns:cx="http://schemas.microsoft.com/office/drawing/2014/chartex" xmlns:m="http://schemas.openxmlformats.org/officeDocument/2006/math" xmlns:mc="http://schemas.openxmlformats.org/markup-compatibility/2006" xmlns:pptd="https://kimi-design.msh.team/pptd/2026" encoding="base64url">eyJ2aWV3Qm94IjpbNDIsMV0sInBvaW50cyI6IjAsMCA0MiwwIn0</pptd:line>
               </p:ext>
             </p:extLst>
           </p:nvPr>
         </p:nvSpPr>
         <p:spPr>
           <a:xfrm>
-            <a:off x="7518400" y="3403600"/>
+            <a:off x="8193644" y="3403600"/>
             <a:ext cx="533400" cy="12700"/>
           </a:xfrm>
           <a:custGeom>
@@ -4153,14 +4153,14 @@
           <p:nvPr>
             <p:extLst>
               <p:ext uri="{F5677B7D-0D2A-4D9B-9A5C-6D8D7D0E5A5D}">
-                <pptd:icon xmlns:pptd="https://kimi-design.msh.team/pptd/2026" xmlns:mc="http://schemas.openxmlformats.org/markup-compatibility/2006" xmlns:m="http://schemas.openxmlformats.org/officeDocument/2006/math" xmlns:cx="http://schemas.microsoft.com/office/drawing/2014/chartex" xmlns:c="http://schemas.openxmlformats.org/drawingml/2006/chart" xmlns:a14="http://schemas.microsoft.com/office/drawing/2010/main" xmlns="" encoding="base64url">eyJpY29uTmFtZSI6ImZhczpjaXJjbGUtY2hlY2sifQ</pptd:icon>
+                <pptd:icon xmlns="" xmlns:a14="http://schemas.microsoft.com/office/drawing/2010/main" xmlns:c="http://schemas.openxmlformats.org/drawingml/2006/chart" xmlns:cx="http://schemas.microsoft.com/office/drawing/2014/chartex" xmlns:m="http://schemas.openxmlformats.org/officeDocument/2006/math" xmlns:mc="http://schemas.openxmlformats.org/markup-compatibility/2006" xmlns:pptd="https://kimi-design.msh.team/pptd/2026" encoding="base64url">eyJpY29uTmFtZSI6ImZhczpjaXJjbGUtY2hlY2sifQ</pptd:icon>
               </p:ext>
             </p:extLst>
           </p:nvPr>
         </p:nvSpPr>
         <p:spPr>
           <a:xfrm>
-            <a:off x="8178800" y="3213100"/>
+            <a:off x="8854044" y="3213100"/>
             <a:ext cx="393700" cy="393700"/>
           </a:xfrm>
           <a:custGeom>
@@ -4343,14 +4343,14 @@
           <p:nvPr>
             <p:extLst>
               <p:ext uri="{F5677B7D-0D2A-4D9B-9A5C-6D8D7D0E5A5D}">
-                <pptd:line xmlns:pptd="https://kimi-design.msh.team/pptd/2026" xmlns:mc="http://schemas.openxmlformats.org/markup-compatibility/2006" xmlns:m="http://schemas.openxmlformats.org/officeDocument/2006/math" xmlns:cx="http://schemas.microsoft.com/office/drawing/2014/chartex" xmlns:c="http://schemas.openxmlformats.org/drawingml/2006/chart" xmlns:a14="http://schemas.microsoft.com/office/drawing/2010/main" xmlns="" encoding="base64url">eyJ2aWV3Qm94IjpbNDIsMV0sInBvaW50cyI6IjAsMCA0MiwwIn0</pptd:line>
+                <pptd:line xmlns="" xmlns:a14="http://schemas.microsoft.com/office/drawing/2010/main" xmlns:c="http://schemas.openxmlformats.org/drawingml/2006/chart" xmlns:cx="http://schemas.microsoft.com/office/drawing/2014/chartex" xmlns:m="http://schemas.openxmlformats.org/officeDocument/2006/math" xmlns:mc="http://schemas.openxmlformats.org/markup-compatibility/2006" xmlns:pptd="https://kimi-design.msh.team/pptd/2026" encoding="base64url">eyJ2aWV3Qm94IjpbNDIsMV0sInBvaW50cyI6IjAsMCA0MiwwIn0</pptd:line>
               </p:ext>
             </p:extLst>
           </p:nvPr>
         </p:nvSpPr>
         <p:spPr>
           <a:xfrm>
-            <a:off x="10134600" y="3403600"/>
+            <a:off x="10458155" y="3403600"/>
             <a:ext cx="533400" cy="12700"/>
           </a:xfrm>
           <a:custGeom>
@@ -4387,14 +4387,14 @@
           <p:nvPr>
             <p:extLst>
               <p:ext uri="{F5677B7D-0D2A-4D9B-9A5C-6D8D7D0E5A5D}">
-                <pptd:icon xmlns:pptd="https://kimi-design.msh.team/pptd/2026" xmlns:mc="http://schemas.openxmlformats.org/markup-compatibility/2006" xmlns:m="http://schemas.openxmlformats.org/officeDocument/2006/math" xmlns:cx="http://schemas.microsoft.com/office/drawing/2014/chartex" xmlns:c="http://schemas.openxmlformats.org/drawingml/2006/chart" xmlns:a14="http://schemas.microsoft.com/office/drawing/2010/main" xmlns="" encoding="base64url">eyJpY29uTmFtZSI6ImZhczpkYXRhYmFzZSJ9</pptd:icon>
+                <pptd:icon xmlns="" xmlns:a14="http://schemas.microsoft.com/office/drawing/2010/main" xmlns:c="http://schemas.openxmlformats.org/drawingml/2006/chart" xmlns:cx="http://schemas.microsoft.com/office/drawing/2014/chartex" xmlns:m="http://schemas.openxmlformats.org/officeDocument/2006/math" xmlns:mc="http://schemas.openxmlformats.org/markup-compatibility/2006" xmlns:pptd="https://kimi-design.msh.team/pptd/2026" encoding="base64url">eyJpY29uTmFtZSI6ImZhczpkYXRhYmFzZSJ9</pptd:icon>
               </p:ext>
             </p:extLst>
           </p:nvPr>
         </p:nvSpPr>
         <p:spPr>
           <a:xfrm>
-            <a:off x="10795000" y="3213100"/>
+            <a:off x="11118555" y="3213100"/>
             <a:ext cx="393700" cy="393700"/>
           </a:xfrm>
           <a:custGeom>
@@ -5428,7 +5428,7 @@
           <p:nvPr>
             <p:extLst>
               <p:ext uri="{F5677B7D-0D2A-4D9B-9A5C-6D8D7D0E5A5D}">
-                <pptd:line xmlns:pptd="https://kimi-design.msh.team/pptd/2026" xmlns:mc="http://schemas.openxmlformats.org/markup-compatibility/2006" xmlns:m="http://schemas.openxmlformats.org/officeDocument/2006/math" xmlns:cx="http://schemas.microsoft.com/office/drawing/2014/chartex" xmlns:c="http://schemas.openxmlformats.org/drawingml/2006/chart" xmlns:a14="http://schemas.microsoft.com/office/drawing/2010/main" xmlns="" encoding="base64url">eyJ2aWV3Qm94IjpbMSwzNTRdLCJwb2ludHMiOiIwLDAgMCwzNTQifQ</pptd:line>
+                <pptd:line xmlns="" xmlns:a14="http://schemas.microsoft.com/office/drawing/2010/main" xmlns:c="http://schemas.openxmlformats.org/drawingml/2006/chart" xmlns:cx="http://schemas.microsoft.com/office/drawing/2014/chartex" xmlns:m="http://schemas.openxmlformats.org/officeDocument/2006/math" xmlns:mc="http://schemas.openxmlformats.org/markup-compatibility/2006" xmlns:pptd="https://kimi-design.msh.team/pptd/2026" encoding="base64url">eyJ2aWV3Qm94IjpbMSwzNTRdLCJwb2ludHMiOiIwLDAgMCwzNTQifQ</pptd:line>
               </p:ext>
             </p:extLst>
           </p:nvPr>
@@ -6332,7 +6332,7 @@
               </a:lnSpc>
             </a:pPr>
             <a:r>
-              <a:rPr lang="en-US" sz="2700" b="1" noProof="1">
+              <a:rPr lang="en-US" sz="2600" b="1" noProof="1">
                 <a:solidFill>
                   <a:srgbClr val="172526"/>
                 </a:solidFill>
@@ -6342,7 +6342,7 @@
               <a:t>Масштабируем решение только после подтверждения
 экономического эффекта и стабильной работы на пилоте</a:t>
             </a:r>
-            <a:endParaRPr lang="en-US" sz="2700" noProof="1"/>
+            <a:endParaRPr lang="en-US" sz="2600" noProof="1"/>
           </a:p>
         </p:txBody>
       </p:sp>
@@ -6875,7 +6875,7 @@
           <p:nvPr>
             <p:extLst>
               <p:ext uri="{F5677B7D-0D2A-4D9B-9A5C-6D8D7D0E5A5D}">
-                <pptd:line xmlns:pptd="https://kimi-design.msh.team/pptd/2026" xmlns:mc="http://schemas.openxmlformats.org/markup-compatibility/2006" xmlns:m="http://schemas.openxmlformats.org/officeDocument/2006/math" xmlns:cx="http://schemas.microsoft.com/office/drawing/2014/chartex" xmlns:c="http://schemas.openxmlformats.org/drawingml/2006/chart" xmlns:a14="http://schemas.microsoft.com/office/drawing/2010/main" xmlns="" encoding="base64url">eyJ2aWV3Qm94IjpbMSwzNTBdLCJwb2ludHMiOiIwLDAgMCwzNTAifQ</pptd:line>
+                <pptd:line xmlns="" xmlns:a14="http://schemas.microsoft.com/office/drawing/2010/main" xmlns:c="http://schemas.openxmlformats.org/drawingml/2006/chart" xmlns:cx="http://schemas.microsoft.com/office/drawing/2014/chartex" xmlns:m="http://schemas.openxmlformats.org/officeDocument/2006/math" xmlns:mc="http://schemas.openxmlformats.org/markup-compatibility/2006" xmlns:pptd="https://kimi-design.msh.team/pptd/2026" encoding="base64url">eyJ2aWV3Qm94IjpbMSwzNTBdLCJwb2ludHMiOiIwLDAgMCwzNTAifQ</pptd:line>
               </p:ext>
             </p:extLst>
           </p:nvPr>
@@ -7597,7 +7597,7 @@
               </a:lnSpc>
             </a:pPr>
             <a:r>
-              <a:rPr lang="en-US" sz="2800" b="1" noProof="1">
+              <a:rPr lang="en-US" sz="2600" b="1" noProof="1">
                 <a:solidFill>
                   <a:srgbClr val="172526"/>
                 </a:solidFill>
@@ -7607,7 +7607,7 @@
               <a:t>Первая линия за 22-26 недель: оборудование,
 данные и модель готовим параллельно</a:t>
             </a:r>
-            <a:endParaRPr lang="en-US" sz="2800" noProof="1"/>
+            <a:endParaRPr lang="en-US" sz="2600" noProof="1"/>
           </a:p>
         </p:txBody>
       </p:sp>
@@ -7700,7 +7700,7 @@
           <p:nvPr>
             <p:extLst>
               <p:ext uri="{F5677B7D-0D2A-4D9B-9A5C-6D8D7D0E5A5D}">
-                <pptd:line xmlns:pptd="https://kimi-design.msh.team/pptd/2026" xmlns:mc="http://schemas.openxmlformats.org/markup-compatibility/2006" xmlns:m="http://schemas.openxmlformats.org/officeDocument/2006/math" xmlns:cx="http://schemas.microsoft.com/office/drawing/2014/chartex" xmlns:c="http://schemas.openxmlformats.org/drawingml/2006/chart" xmlns:a14="http://schemas.microsoft.com/office/drawing/2010/main" xmlns="" encoding="base64url">eyJ2aWV3Qm94IjpbMSw0N10sInBvaW50cyI6IjAsMCAwLDQ3In0</pptd:line>
+                <pptd:line xmlns="" xmlns:a14="http://schemas.microsoft.com/office/drawing/2010/main" xmlns:c="http://schemas.openxmlformats.org/drawingml/2006/chart" xmlns:cx="http://schemas.microsoft.com/office/drawing/2014/chartex" xmlns:m="http://schemas.openxmlformats.org/officeDocument/2006/math" xmlns:mc="http://schemas.openxmlformats.org/markup-compatibility/2006" xmlns:pptd="https://kimi-design.msh.team/pptd/2026" encoding="base64url">eyJ2aWV3Qm94IjpbMSw0N10sInBvaW50cyI6IjAsMCAwLDQ3In0</pptd:line>
               </p:ext>
             </p:extLst>
           </p:nvPr>
@@ -7803,7 +7803,7 @@
           <p:nvPr>
             <p:extLst>
               <p:ext uri="{F5677B7D-0D2A-4D9B-9A5C-6D8D7D0E5A5D}">
-                <pptd:line xmlns:pptd="https://kimi-design.msh.team/pptd/2026" xmlns:mc="http://schemas.openxmlformats.org/markup-compatibility/2006" xmlns:m="http://schemas.openxmlformats.org/officeDocument/2006/math" xmlns:cx="http://schemas.microsoft.com/office/drawing/2014/chartex" xmlns:c="http://schemas.openxmlformats.org/drawingml/2006/chart" xmlns:a14="http://schemas.microsoft.com/office/drawing/2010/main" xmlns="" encoding="base64url">eyJ2aWV3Qm94IjpbMSw0N10sInBvaW50cyI6IjAsMCAwLDQ3In0</pptd:line>
+                <pptd:line xmlns="" xmlns:a14="http://schemas.microsoft.com/office/drawing/2010/main" xmlns:c="http://schemas.openxmlformats.org/drawingml/2006/chart" xmlns:cx="http://schemas.microsoft.com/office/drawing/2014/chartex" xmlns:m="http://schemas.openxmlformats.org/officeDocument/2006/math" xmlns:mc="http://schemas.openxmlformats.org/markup-compatibility/2006" xmlns:pptd="https://kimi-design.msh.team/pptd/2026" encoding="base64url">eyJ2aWV3Qm94IjpbMSw0N10sInBvaW50cyI6IjAsMCAwLDQ3In0</pptd:line>
               </p:ext>
             </p:extLst>
           </p:nvPr>
@@ -8353,7 +8353,7 @@
           <p:nvPr>
             <p:extLst>
               <p:ext uri="{F5677B7D-0D2A-4D9B-9A5C-6D8D7D0E5A5D}">
-                <pptd:line xmlns:pptd="https://kimi-design.msh.team/pptd/2026" xmlns:mc="http://schemas.openxmlformats.org/markup-compatibility/2006" xmlns:m="http://schemas.openxmlformats.org/officeDocument/2006/math" xmlns:cx="http://schemas.microsoft.com/office/drawing/2014/chartex" xmlns:c="http://schemas.openxmlformats.org/drawingml/2006/chart" xmlns:a14="http://schemas.microsoft.com/office/drawing/2010/main" xmlns="" encoding="base64url">eyJ2aWV3Qm94IjpbODY0LDFdLCJwb2ludHMiOiIwLDAgODY0LDAifQ</pptd:line>
+                <pptd:line xmlns="" xmlns:a14="http://schemas.microsoft.com/office/drawing/2010/main" xmlns:c="http://schemas.openxmlformats.org/drawingml/2006/chart" xmlns:cx="http://schemas.microsoft.com/office/drawing/2014/chartex" xmlns:m="http://schemas.openxmlformats.org/officeDocument/2006/math" xmlns:mc="http://schemas.openxmlformats.org/markup-compatibility/2006" xmlns:pptd="https://kimi-design.msh.team/pptd/2026" encoding="base64url">eyJ2aWV3Qm94IjpbODY0LDFdLCJwb2ludHMiOiIwLDAgODY0LDAifQ</pptd:line>
               </p:ext>
             </p:extLst>
           </p:nvPr>
@@ -8558,7 +8558,7 @@
           <p:nvPr>
             <p:extLst>
               <p:ext uri="{F5677B7D-0D2A-4D9B-9A5C-6D8D7D0E5A5D}">
-                <pptd:line xmlns:pptd="https://kimi-design.msh.team/pptd/2026" xmlns:mc="http://schemas.openxmlformats.org/markup-compatibility/2006" xmlns:m="http://schemas.openxmlformats.org/officeDocument/2006/math" xmlns:cx="http://schemas.microsoft.com/office/drawing/2014/chartex" xmlns:c="http://schemas.openxmlformats.org/drawingml/2006/chart" xmlns:a14="http://schemas.microsoft.com/office/drawing/2010/main" xmlns="" encoding="base64url">eyJ2aWV3Qm94IjpbMSw5NV0sInBvaW50cyI6IjAsMCAwLDk1In0</pptd:line>
+                <pptd:line xmlns="" xmlns:a14="http://schemas.microsoft.com/office/drawing/2010/main" xmlns:c="http://schemas.openxmlformats.org/drawingml/2006/chart" xmlns:cx="http://schemas.microsoft.com/office/drawing/2014/chartex" xmlns:m="http://schemas.openxmlformats.org/officeDocument/2006/math" xmlns:mc="http://schemas.openxmlformats.org/markup-compatibility/2006" xmlns:pptd="https://kimi-design.msh.team/pptd/2026" encoding="base64url">eyJ2aWV3Qm94IjpbMSw5NV0sInBvaW50cyI6IjAsMCAwLDk1In0</pptd:line>
               </p:ext>
             </p:extLst>
           </p:nvPr>
@@ -9002,7 +9002,7 @@
               </a:lnSpc>
             </a:pPr>
             <a:r>
-              <a:rPr lang="en-US" sz="2800" b="1" noProof="1">
+              <a:rPr lang="en-US" sz="2600" b="1" noProof="1">
                 <a:solidFill>
                   <a:srgbClr val="172526"/>
                 </a:solidFill>
@@ -9012,7 +9012,7 @@
               <a:t>Масштабируем после испытания на реальной линии
 и подтверждения готовности персонала и процесса</a:t>
             </a:r>
-            <a:endParaRPr lang="en-US" sz="2800" noProof="1"/>
+            <a:endParaRPr lang="en-US" sz="2600" noProof="1"/>
           </a:p>
         </p:txBody>
       </p:sp>
@@ -9533,7 +9533,7 @@
           <p:nvPr>
             <p:extLst>
               <p:ext uri="{F5677B7D-0D2A-4D9B-9A5C-6D8D7D0E5A5D}">
-                <pptd:line xmlns:pptd="https://kimi-design.msh.team/pptd/2026" xmlns:mc="http://schemas.openxmlformats.org/markup-compatibility/2006" xmlns:m="http://schemas.openxmlformats.org/officeDocument/2006/math" xmlns:cx="http://schemas.microsoft.com/office/drawing/2014/chartex" xmlns:c="http://schemas.openxmlformats.org/drawingml/2006/chart" xmlns:a14="http://schemas.microsoft.com/office/drawing/2010/main" xmlns="" encoding="base64url">eyJ2aWV3Qm94IjpbODY0LDFdLCJwb2ludHMiOiIwLDAgODY0LDAifQ</pptd:line>
+                <pptd:line xmlns="" xmlns:a14="http://schemas.microsoft.com/office/drawing/2010/main" xmlns:c="http://schemas.openxmlformats.org/drawingml/2006/chart" xmlns:cx="http://schemas.microsoft.com/office/drawing/2014/chartex" xmlns:m="http://schemas.openxmlformats.org/officeDocument/2006/math" xmlns:mc="http://schemas.openxmlformats.org/markup-compatibility/2006" xmlns:pptd="https://kimi-design.msh.team/pptd/2026" encoding="base64url">eyJ2aWV3Qm94IjpbODY0LDFdLCJwb2ludHMiOiIwLDAgODY0LDAifQ</pptd:line>
               </p:ext>
             </p:extLst>
           </p:nvPr>
@@ -9732,7 +9732,7 @@
           <p:nvPr>
             <p:extLst>
               <p:ext uri="{F5677B7D-0D2A-4D9B-9A5C-6D8D7D0E5A5D}">
-                <pptd:line xmlns:pptd="https://kimi-design.msh.team/pptd/2026" xmlns:mc="http://schemas.openxmlformats.org/markup-compatibility/2006" xmlns:m="http://schemas.openxmlformats.org/officeDocument/2006/math" xmlns:cx="http://schemas.microsoft.com/office/drawing/2014/chartex" xmlns:c="http://schemas.openxmlformats.org/drawingml/2006/chart" xmlns:a14="http://schemas.microsoft.com/office/drawing/2010/main" xmlns="" encoding="base64url">eyJ2aWV3Qm94IjpbMSwxMTRdLCJwb2ludHMiOiIwLDAgMCwxMTQifQ</pptd:line>
+                <pptd:line xmlns="" xmlns:a14="http://schemas.microsoft.com/office/drawing/2010/main" xmlns:c="http://schemas.openxmlformats.org/drawingml/2006/chart" xmlns:cx="http://schemas.microsoft.com/office/drawing/2014/chartex" xmlns:m="http://schemas.openxmlformats.org/officeDocument/2006/math" xmlns:mc="http://schemas.openxmlformats.org/markup-compatibility/2006" xmlns:pptd="https://kimi-design.msh.team/pptd/2026" encoding="base64url">eyJ2aWV3Qm94IjpbMSwxMTRdLCJwb2ludHMiOiIwLDAgMCwxMTQifQ</pptd:line>
               </p:ext>
             </p:extLst>
           </p:nvPr>
